--- a/VOIS_Major_Project_PPT_RajYadav.pptx
+++ b/VOIS_Major_Project_PPT_RajYadav.pptx
@@ -14291,8 +14291,8 @@
         </p:nvSpPr>
         <p:spPr>
           <a:xfrm>
-            <a:off x="320982" y="1275371"/>
-            <a:ext cx="3343561" cy="666078"/>
+            <a:off x="320982" y="1275370"/>
+            <a:ext cx="6912331" cy="2955435"/>
           </a:xfrm>
           <a:prstGeom prst="rect">
             <a:avLst/>
@@ -14784,6 +14784,54 @@
           </a:lstStyle>
           <a:p>
             <a:endParaRPr lang="en-GB" sz="2000" dirty="0"/>
+          </a:p>
+        </p:txBody>
+      </p:sp>
+      <p:sp>
+        <p:nvSpPr>
+          <p:cNvPr id="2" name="TextBox 1">
+            <a:extLst>
+              <a:ext uri="{FF2B5EF4-FFF2-40B4-BE49-F238E27FC236}">
+                <a16:creationId xmlns:a16="http://schemas.microsoft.com/office/drawing/2014/main" id="{60DF2D85-73FA-3C01-8C60-05C253485351}"/>
+              </a:ext>
+            </a:extLst>
+          </p:cNvPr>
+          <p:cNvSpPr txBox="1"/>
+          <p:nvPr/>
+        </p:nvSpPr>
+        <p:spPr>
+          <a:xfrm>
+            <a:off x="423080" y="1275370"/>
+            <a:ext cx="6912331" cy="2246769"/>
+          </a:xfrm>
+          <a:prstGeom prst="rect">
+            <a:avLst/>
+          </a:prstGeom>
+          <a:noFill/>
+        </p:spPr>
+        <p:txBody>
+          <a:bodyPr wrap="square" rtlCol="0">
+            <a:spAutoFit/>
+          </a:bodyPr>
+          <a:lstStyle/>
+          <a:p>
+            <a:r>
+              <a:rPr lang="en-IN" sz="3200" dirty="0" err="1"/>
+              <a:t>Github</a:t>
+            </a:r>
+            <a:r>
+              <a:rPr lang="en-IN" sz="3200" dirty="0"/>
+              <a:t> Repo Link :-</a:t>
+            </a:r>
+          </a:p>
+          <a:p>
+            <a:endParaRPr lang="en-IN" sz="2400" dirty="0"/>
+          </a:p>
+          <a:p>
+            <a:r>
+              <a:rPr lang="en-IN" sz="2800" dirty="0"/>
+              <a:t>https://github.com/rajyadav-590/Seasonal-Agriculture-Performance-Analysis.git</a:t>
+            </a:r>
           </a:p>
         </p:txBody>
       </p:sp>
